--- a/catalog/samples/back_cover.pptx
+++ b/catalog/samples/back_cover.pptx
@@ -672,7 +672,7 @@
           </a:p>
           <a:p>
             <a:r>
-              <a:t>  "template_sha256": "2128a393a1594efad8a6fa03329690ab493f0ab8486dc8ce665840e1b5a35916"</a:t>
+              <a:t>  "template_sha256": "e8d66eaf396ab0f01ed1ce7483261cef10ac49cb1b6eefc797c6ddc187424718"</a:t>
             </a:r>
           </a:p>
           <a:p>
